--- a/examples/output/review-demo/draft-review-dcc-mcp-framework.pptx
+++ b/examples/output/review-demo/draft-review-dcc-mcp-framework.pptx
@@ -3602,20 +3602,20 @@
       </p:sp>
       <p:sp>
         <p:nvSpPr>
-          <p:cNvPr id="4" name="Rectangle 3"/>
+          <p:cNvPr id="4" name="Oval 3"/>
           <p:cNvSpPr/>
           <p:nvPr/>
         </p:nvSpPr>
         <p:spPr>
           <a:xfrm>
-            <a:off x="822960" y="2377440"/>
-            <a:ext cx="2011680" cy="50800"/>
-          </a:xfrm>
-          <a:prstGeom prst="rect">
+            <a:off x="9281160" y="4434840"/>
+            <a:ext cx="2788920" cy="2286000"/>
+          </a:xfrm>
+          <a:prstGeom prst="ellipse">
             <a:avLst/>
           </a:prstGeom>
           <a:solidFill>
-            <a:srgbClr val="4D9DE0"/>
+            <a:srgbClr val="223047"/>
           </a:solidFill>
           <a:ln>
             <a:noFill/>
@@ -3637,7 +3637,7 @@
           </a:fontRef>
         </p:style>
         <p:txBody>
-          <a:bodyPr rtlCol="0" anchor="ctr" wrap="square"/>
+          <a:bodyPr rtlCol="0" anchor="ctr"/>
           <a:lstStyle/>
           <a:p>
             <a:pPr algn="ctr"/>
@@ -3652,8 +3652,8 @@
         </p:nvSpPr>
         <p:spPr>
           <a:xfrm>
-            <a:off x="822960" y="2514600"/>
-            <a:ext cx="10515600" cy="1463040"/>
+            <a:off x="1371600" y="2651760"/>
+            <a:ext cx="9418320" cy="1280160"/>
           </a:xfrm>
           <a:prstGeom prst="rect">
             <a:avLst/>
@@ -3667,7 +3667,7 @@
           </a:bodyPr>
           <a:lstStyle/>
           <a:p>
-            <a:pPr algn="l"/>
+            <a:pPr algn="ctr"/>
             <a:r>
               <a:rPr sz="5400" b="1">
                 <a:solidFill>
@@ -3683,14 +3683,58 @@
       </p:sp>
       <p:sp>
         <p:nvSpPr>
-          <p:cNvPr id="6" name="TextBox 5"/>
+          <p:cNvPr id="6" name="Rectangle 5"/>
+          <p:cNvSpPr/>
+          <p:nvPr/>
+        </p:nvSpPr>
+        <p:spPr>
+          <a:xfrm>
+            <a:off x="5687568" y="3977639"/>
+            <a:ext cx="822960" cy="50800"/>
+          </a:xfrm>
+          <a:prstGeom prst="rect">
+            <a:avLst/>
+          </a:prstGeom>
+          <a:solidFill>
+            <a:srgbClr val="4D9DE0"/>
+          </a:solidFill>
+          <a:ln>
+            <a:noFill/>
+          </a:ln>
+          <a:effectLst/>
+        </p:spPr>
+        <p:style>
+          <a:lnRef idx="1">
+            <a:schemeClr val="accent1"/>
+          </a:lnRef>
+          <a:fillRef idx="3">
+            <a:schemeClr val="accent1"/>
+          </a:fillRef>
+          <a:effectRef idx="2">
+            <a:schemeClr val="accent1"/>
+          </a:effectRef>
+          <a:fontRef idx="minor">
+            <a:schemeClr val="lt1"/>
+          </a:fontRef>
+        </p:style>
+        <p:txBody>
+          <a:bodyPr rtlCol="0" anchor="ctr" wrap="square"/>
+          <a:lstStyle/>
+          <a:p>
+            <a:pPr algn="ctr"/>
+          </a:p>
+        </p:txBody>
+      </p:sp>
+      <p:sp>
+        <p:nvSpPr>
+          <p:cNvPr id="7" name="TextBox 6"/>
           <p:cNvSpPr txBox="1"/>
           <p:nvPr/>
         </p:nvSpPr>
         <p:spPr>
           <a:xfrm>
-            <a:off x="822960" y="4023360"/>
-            <a:ext cx="10058400" cy="1097280"/>
+            <a:off x="1371600" y="4251960"/>
+            <a:ext cx="9418320" cy="914400"/>
           </a:xfrm>
           <a:prstGeom prst="rect">
             <a:avLst/>
@@ -3704,9 +3748,9 @@
           </a:bodyPr>
           <a:lstStyle/>
           <a:p>
-            <a:pPr algn="l"/>
-            <a:r>
-              <a:rPr sz="2000" b="0">
+            <a:pPr algn="ctr"/>
+            <a:r>
+              <a:rPr sz="1800" b="0">
                 <a:solidFill>
                   <a:srgbClr val="9AA7BC"/>
                 </a:solidFill>
@@ -3720,14 +3764,14 @@
       </p:sp>
       <p:sp>
         <p:nvSpPr>
-          <p:cNvPr id="7" name="TextBox 6"/>
+          <p:cNvPr id="8" name="TextBox 7"/>
           <p:cNvSpPr txBox="1"/>
           <p:nvPr/>
         </p:nvSpPr>
         <p:spPr>
           <a:xfrm>
-            <a:off x="822960" y="6126480"/>
-            <a:ext cx="10058400" cy="365760"/>
+            <a:off x="1371600" y="6263640"/>
+            <a:ext cx="9418320" cy="320040"/>
           </a:xfrm>
           <a:prstGeom prst="rect">
             <a:avLst/>
@@ -3741,9 +3785,9 @@
           </a:bodyPr>
           <a:lstStyle/>
           <a:p>
-            <a:pPr algn="l"/>
-            <a:r>
-              <a:rPr sz="1200" b="0">
+            <a:pPr algn="ctr"/>
+            <a:r>
+              <a:rPr sz="1100" b="0">
                 <a:solidFill>
                   <a:srgbClr val="9AA7BC"/>
                 </a:solidFill>
@@ -3757,7 +3801,44 @@
       </p:sp>
       <p:sp>
         <p:nvSpPr>
-          <p:cNvPr id="8" name="TextBox 7"/>
+          <p:cNvPr id="9" name="TextBox 8"/>
+          <p:cNvSpPr txBox="1"/>
+          <p:nvPr/>
+        </p:nvSpPr>
+        <p:spPr>
+          <a:xfrm>
+            <a:off x="822960" y="6473952"/>
+            <a:ext cx="7315200" cy="274320"/>
+          </a:xfrm>
+          <a:prstGeom prst="rect">
+            <a:avLst/>
+          </a:prstGeom>
+          <a:noFill/>
+          <a:effectLst/>
+        </p:spPr>
+        <p:txBody>
+          <a:bodyPr wrap="square" lIns="50800" rIns="50800">
+            <a:spAutoFit/>
+          </a:bodyPr>
+          <a:lstStyle/>
+          <a:p>
+            <a:pPr algn="l"/>
+            <a:r>
+              <a:rPr sz="1000" b="0">
+                <a:solidFill>
+                  <a:srgbClr val="9AA7BC"/>
+                </a:solidFill>
+                <a:latin typeface="Segoe UI"/>
+                <a:ea typeface="Microsoft YaHei"/>
+              </a:rPr>
+              <a:t>DCC-MCP Framework Review — Demo</a:t>
+            </a:r>
+          </a:p>
+        </p:txBody>
+      </p:sp>
+      <p:sp>
+        <p:nvSpPr>
+          <p:cNvPr id="10" name="TextBox 9"/>
           <p:cNvSpPr txBox="1"/>
           <p:nvPr/>
         </p:nvSpPr>
@@ -3862,8 +3943,8 @@
         </p:nvSpPr>
         <p:spPr>
           <a:xfrm>
-            <a:off x="822960" y="457200"/>
-            <a:ext cx="10515600" cy="731520"/>
+            <a:off x="822960" y="502920"/>
+            <a:ext cx="10515600" cy="685800"/>
           </a:xfrm>
           <a:prstGeom prst="rect">
             <a:avLst/>
@@ -3879,7 +3960,7 @@
           <a:p>
             <a:pPr algn="l"/>
             <a:r>
-              <a:rPr sz="3000" b="1">
+              <a:rPr sz="2800" b="1">
                 <a:solidFill>
                   <a:srgbClr val="E8ECF2"/>
                 </a:solidFill>
@@ -3893,22 +3974,20 @@
       </p:sp>
       <p:sp>
         <p:nvSpPr>
-          <p:cNvPr id="4" name="Rounded Rectangle 3"/>
+          <p:cNvPr id="4" name="Rectangle 3"/>
           <p:cNvSpPr/>
           <p:nvPr/>
         </p:nvSpPr>
         <p:spPr>
           <a:xfrm>
-            <a:off x="822960" y="1371600"/>
-            <a:ext cx="10515600" cy="777240"/>
-          </a:xfrm>
-          <a:prstGeom prst="roundRect">
-            <a:avLst>
-              <a:gd name="adj" fmla="val 18000"/>
-            </a:avLst>
+            <a:off x="822960" y="1298448"/>
+            <a:ext cx="822960" cy="44450"/>
+          </a:xfrm>
+          <a:prstGeom prst="rect">
+            <a:avLst/>
           </a:prstGeom>
           <a:solidFill>
-            <a:srgbClr val="1E2A3D"/>
+            <a:srgbClr val="4D9DE0"/>
           </a:solidFill>
           <a:ln>
             <a:noFill/>
@@ -3930,41 +4009,29 @@
           </a:fontRef>
         </p:style>
         <p:txBody>
-          <a:bodyPr rtlCol="0" anchor="ctr" wrap="square" lIns="101600" rIns="101600" tIns="76200" bIns="76200"/>
-          <a:lstStyle/>
-          <a:p>
-            <a:pPr algn="l"/>
-            <a:r>
-              <a:rPr sz="1700" b="0">
-                <a:solidFill>
-                  <a:srgbClr val="E8ECF2"/>
-                </a:solidFill>
-                <a:latin typeface="Segoe UI"/>
-                <a:ea typeface="Microsoft YaHei"/>
-              </a:rPr>
-              <a:t>●  deck_architecture — v1 (dcc-mcp-office)</a:t>
-            </a:r>
-          </a:p>
-        </p:txBody>
-      </p:sp>
-      <p:sp>
-        <p:nvSpPr>
-          <p:cNvPr id="5" name="Rounded Rectangle 4"/>
+          <a:bodyPr rtlCol="0" anchor="ctr" wrap="square"/>
+          <a:lstStyle/>
+          <a:p>
+            <a:pPr algn="ctr"/>
+          </a:p>
+        </p:txBody>
+      </p:sp>
+      <p:sp>
+        <p:nvSpPr>
+          <p:cNvPr id="5" name="Oval 4"/>
           <p:cNvSpPr/>
           <p:nvPr/>
         </p:nvSpPr>
         <p:spPr>
           <a:xfrm>
-            <a:off x="822960" y="2286000"/>
-            <a:ext cx="10515600" cy="777240"/>
-          </a:xfrm>
-          <a:prstGeom prst="roundRect">
-            <a:avLst>
-              <a:gd name="adj" fmla="val 18000"/>
-            </a:avLst>
+            <a:off x="868680" y="1783080"/>
+            <a:ext cx="165100" cy="165100"/>
+          </a:xfrm>
+          <a:prstGeom prst="ellipse">
+            <a:avLst/>
           </a:prstGeom>
           <a:solidFill>
-            <a:srgbClr val="1E2A3D"/>
+            <a:srgbClr val="7FC8A9"/>
           </a:solidFill>
           <a:ln>
             <a:noFill/>
@@ -3986,26 +4053,215 @@
           </a:fontRef>
         </p:style>
         <p:txBody>
-          <a:bodyPr rtlCol="0" anchor="ctr" wrap="square" lIns="101600" rIns="101600" tIns="76200" bIns="76200"/>
+          <a:bodyPr rtlCol="0" anchor="ctr" wrap="square"/>
+          <a:lstStyle/>
+          <a:p>
+            <a:pPr algn="ctr"/>
+          </a:p>
+        </p:txBody>
+      </p:sp>
+      <p:sp>
+        <p:nvSpPr>
+          <p:cNvPr id="6" name="TextBox 5"/>
+          <p:cNvSpPr txBox="1"/>
+          <p:nvPr/>
+        </p:nvSpPr>
+        <p:spPr>
+          <a:xfrm>
+            <a:off x="1234440" y="1627632"/>
+            <a:ext cx="10012680" cy="822960"/>
+          </a:xfrm>
+          <a:prstGeom prst="rect">
+            <a:avLst/>
+          </a:prstGeom>
+          <a:noFill/>
+          <a:effectLst/>
+        </p:spPr>
+        <p:txBody>
+          <a:bodyPr wrap="square" lIns="50800" rIns="50800">
+            <a:spAutoFit/>
+          </a:bodyPr>
           <a:lstStyle/>
           <a:p>
             <a:pPr algn="l"/>
             <a:r>
-              <a:rPr sz="1700" b="0">
+              <a:rPr sz="1650" b="0">
                 <a:solidFill>
                   <a:srgbClr val="E8ECF2"/>
                 </a:solidFill>
                 <a:latin typeface="Segoe UI"/>
                 <a:ea typeface="Microsoft YaHei"/>
               </a:rPr>
-              <a:t>●  deck_kpi — v1 (dcc-mcp-office)</a:t>
-            </a:r>
-          </a:p>
-        </p:txBody>
-      </p:sp>
-      <p:sp>
-        <p:nvSpPr>
-          <p:cNvPr id="6" name="TextBox 5"/>
+              <a:t>deck_architecture — v1 (dcc-mcp-office)</a:t>
+            </a:r>
+          </a:p>
+        </p:txBody>
+      </p:sp>
+      <p:sp>
+        <p:nvSpPr>
+          <p:cNvPr id="7" name="Rectangle 6"/>
+          <p:cNvSpPr/>
+          <p:nvPr/>
+        </p:nvSpPr>
+        <p:spPr>
+          <a:xfrm>
+            <a:off x="822960" y="2496312"/>
+            <a:ext cx="10515600" cy="15240"/>
+          </a:xfrm>
+          <a:prstGeom prst="rect">
+            <a:avLst/>
+          </a:prstGeom>
+          <a:solidFill>
+            <a:srgbClr val="223047"/>
+          </a:solidFill>
+          <a:ln>
+            <a:noFill/>
+          </a:ln>
+          <a:effectLst/>
+        </p:spPr>
+        <p:style>
+          <a:lnRef idx="1">
+            <a:schemeClr val="accent1"/>
+          </a:lnRef>
+          <a:fillRef idx="3">
+            <a:schemeClr val="accent1"/>
+          </a:fillRef>
+          <a:effectRef idx="2">
+            <a:schemeClr val="accent1"/>
+          </a:effectRef>
+          <a:fontRef idx="minor">
+            <a:schemeClr val="lt1"/>
+          </a:fontRef>
+        </p:style>
+        <p:txBody>
+          <a:bodyPr rtlCol="0" anchor="ctr" wrap="square"/>
+          <a:lstStyle/>
+          <a:p>
+            <a:pPr algn="ctr"/>
+          </a:p>
+        </p:txBody>
+      </p:sp>
+      <p:sp>
+        <p:nvSpPr>
+          <p:cNvPr id="8" name="Oval 7"/>
+          <p:cNvSpPr/>
+          <p:nvPr/>
+        </p:nvSpPr>
+        <p:spPr>
+          <a:xfrm>
+            <a:off x="868680" y="2715768"/>
+            <a:ext cx="165100" cy="165100"/>
+          </a:xfrm>
+          <a:prstGeom prst="ellipse">
+            <a:avLst/>
+          </a:prstGeom>
+          <a:solidFill>
+            <a:srgbClr val="7FC8A9"/>
+          </a:solidFill>
+          <a:ln>
+            <a:noFill/>
+          </a:ln>
+          <a:effectLst/>
+        </p:spPr>
+        <p:style>
+          <a:lnRef idx="1">
+            <a:schemeClr val="accent1"/>
+          </a:lnRef>
+          <a:fillRef idx="3">
+            <a:schemeClr val="accent1"/>
+          </a:fillRef>
+          <a:effectRef idx="2">
+            <a:schemeClr val="accent1"/>
+          </a:effectRef>
+          <a:fontRef idx="minor">
+            <a:schemeClr val="lt1"/>
+          </a:fontRef>
+        </p:style>
+        <p:txBody>
+          <a:bodyPr rtlCol="0" anchor="ctr" wrap="square"/>
+          <a:lstStyle/>
+          <a:p>
+            <a:pPr algn="ctr"/>
+          </a:p>
+        </p:txBody>
+      </p:sp>
+      <p:sp>
+        <p:nvSpPr>
+          <p:cNvPr id="9" name="TextBox 8"/>
+          <p:cNvSpPr txBox="1"/>
+          <p:nvPr/>
+        </p:nvSpPr>
+        <p:spPr>
+          <a:xfrm>
+            <a:off x="1234440" y="2560320"/>
+            <a:ext cx="10012680" cy="822960"/>
+          </a:xfrm>
+          <a:prstGeom prst="rect">
+            <a:avLst/>
+          </a:prstGeom>
+          <a:noFill/>
+          <a:effectLst/>
+        </p:spPr>
+        <p:txBody>
+          <a:bodyPr wrap="square" lIns="50800" rIns="50800">
+            <a:spAutoFit/>
+          </a:bodyPr>
+          <a:lstStyle/>
+          <a:p>
+            <a:pPr algn="l"/>
+            <a:r>
+              <a:rPr sz="1650" b="0">
+                <a:solidFill>
+                  <a:srgbClr val="E8ECF2"/>
+                </a:solidFill>
+                <a:latin typeface="Segoe UI"/>
+                <a:ea typeface="Microsoft YaHei"/>
+              </a:rPr>
+              <a:t>deck_kpi — v1 (dcc-mcp-office)</a:t>
+            </a:r>
+          </a:p>
+        </p:txBody>
+      </p:sp>
+      <p:sp>
+        <p:nvSpPr>
+          <p:cNvPr id="10" name="TextBox 9"/>
+          <p:cNvSpPr txBox="1"/>
+          <p:nvPr/>
+        </p:nvSpPr>
+        <p:spPr>
+          <a:xfrm>
+            <a:off x="822960" y="6473952"/>
+            <a:ext cx="7315200" cy="274320"/>
+          </a:xfrm>
+          <a:prstGeom prst="rect">
+            <a:avLst/>
+          </a:prstGeom>
+          <a:noFill/>
+          <a:effectLst/>
+        </p:spPr>
+        <p:txBody>
+          <a:bodyPr wrap="square" lIns="50800" rIns="50800">
+            <a:spAutoFit/>
+          </a:bodyPr>
+          <a:lstStyle/>
+          <a:p>
+            <a:pPr algn="l"/>
+            <a:r>
+              <a:rPr sz="1000" b="0">
+                <a:solidFill>
+                  <a:srgbClr val="9AA7BC"/>
+                </a:solidFill>
+                <a:latin typeface="Segoe UI"/>
+                <a:ea typeface="Microsoft YaHei"/>
+              </a:rPr>
+              <a:t>DCC-MCP Framework Review — Demo</a:t>
+            </a:r>
+          </a:p>
+        </p:txBody>
+      </p:sp>
+      <p:sp>
+        <p:nvSpPr>
+          <p:cNvPr id="11" name="TextBox 10"/>
           <p:cNvSpPr txBox="1"/>
           <p:nvPr/>
         </p:nvSpPr>
@@ -4110,8 +4366,8 @@
         </p:nvSpPr>
         <p:spPr>
           <a:xfrm>
-            <a:off x="822960" y="457200"/>
-            <a:ext cx="10515600" cy="731520"/>
+            <a:off x="822960" y="502920"/>
+            <a:ext cx="10515600" cy="685800"/>
           </a:xfrm>
           <a:prstGeom prst="rect">
             <a:avLst/>
@@ -4127,7 +4383,7 @@
           <a:p>
             <a:pPr algn="l"/>
             <a:r>
-              <a:rPr sz="3000" b="1">
+              <a:rPr sz="2800" b="1">
                 <a:solidFill>
                   <a:srgbClr val="E8ECF2"/>
                 </a:solidFill>
@@ -4139,48 +4395,22 @@
           </a:p>
         </p:txBody>
       </p:sp>
-      <p:pic>
-        <p:nvPicPr>
-          <p:cNvPr id="4" name="Picture 3" descr="slide-04.png"/>
-          <p:cNvPicPr>
-            <a:picLocks noChangeAspect="1"/>
-          </p:cNvPicPr>
+      <p:sp>
+        <p:nvSpPr>
+          <p:cNvPr id="4" name="Rectangle 3"/>
+          <p:cNvSpPr/>
           <p:nvPr/>
-        </p:nvPicPr>
-        <p:blipFill>
-          <a:blip r:embed="rId2"/>
-          <a:stretch>
-            <a:fillRect/>
-          </a:stretch>
-        </p:blipFill>
-        <p:spPr>
-          <a:xfrm>
-            <a:off x="822960" y="1371600"/>
-            <a:ext cx="8453120" cy="4754880"/>
+        </p:nvSpPr>
+        <p:spPr>
+          <a:xfrm>
+            <a:off x="822960" y="1298448"/>
+            <a:ext cx="822960" cy="44450"/>
           </a:xfrm>
           <a:prstGeom prst="rect">
             <a:avLst/>
           </a:prstGeom>
-        </p:spPr>
-      </p:pic>
-      <p:sp>
-        <p:nvSpPr>
-          <p:cNvPr id="5" name="Rounded Rectangle 4"/>
-          <p:cNvSpPr/>
-          <p:nvPr/>
-        </p:nvSpPr>
-        <p:spPr>
-          <a:xfrm>
-            <a:off x="6766560" y="1371600"/>
-            <a:ext cx="4572000" cy="4754880"/>
-          </a:xfrm>
-          <a:prstGeom prst="roundRect">
-            <a:avLst>
-              <a:gd name="adj" fmla="val 6000"/>
-            </a:avLst>
-          </a:prstGeom>
           <a:solidFill>
-            <a:srgbClr val="1E2A3D"/>
+            <a:srgbClr val="4D9DE0"/>
           </a:solidFill>
           <a:ln>
             <a:noFill/>
@@ -4202,12 +4432,82 @@
           </a:fontRef>
         </p:style>
         <p:txBody>
+          <a:bodyPr rtlCol="0" anchor="ctr" wrap="square"/>
+          <a:lstStyle/>
+          <a:p>
+            <a:pPr algn="ctr"/>
+          </a:p>
+        </p:txBody>
+      </p:sp>
+      <p:pic>
+        <p:nvPicPr>
+          <p:cNvPr id="5" name="Picture 4" descr="slide-04.png"/>
+          <p:cNvPicPr>
+            <a:picLocks noChangeAspect="1"/>
+          </p:cNvPicPr>
+          <p:nvPr/>
+        </p:nvPicPr>
+        <p:blipFill>
+          <a:blip r:embed="rId2"/>
+          <a:stretch>
+            <a:fillRect/>
+          </a:stretch>
+        </p:blipFill>
+        <p:spPr>
+          <a:xfrm>
+            <a:off x="822960" y="1627632"/>
+            <a:ext cx="7640320" cy="4297680"/>
+          </a:xfrm>
+          <a:prstGeom prst="rect">
+            <a:avLst/>
+          </a:prstGeom>
+        </p:spPr>
+      </p:pic>
+      <p:sp>
+        <p:nvSpPr>
+          <p:cNvPr id="6" name="Rounded Rectangle 5"/>
+          <p:cNvSpPr/>
+          <p:nvPr/>
+        </p:nvSpPr>
+        <p:spPr>
+          <a:xfrm>
+            <a:off x="6446520" y="1627632"/>
+            <a:ext cx="4846320" cy="4297680"/>
+          </a:xfrm>
+          <a:prstGeom prst="roundRect">
+            <a:avLst>
+              <a:gd name="adj" fmla="val 5000"/>
+            </a:avLst>
+          </a:prstGeom>
+          <a:solidFill>
+            <a:srgbClr val="1E2A3D"/>
+          </a:solidFill>
+          <a:ln>
+            <a:noFill/>
+          </a:ln>
+          <a:effectLst/>
+        </p:spPr>
+        <p:style>
+          <a:lnRef idx="1">
+            <a:schemeClr val="accent1"/>
+          </a:lnRef>
+          <a:fillRef idx="3">
+            <a:schemeClr val="accent1"/>
+          </a:fillRef>
+          <a:effectRef idx="2">
+            <a:schemeClr val="accent1"/>
+          </a:effectRef>
+          <a:fontRef idx="minor">
+            <a:schemeClr val="lt1"/>
+          </a:fontRef>
+        </p:style>
+        <p:txBody>
           <a:bodyPr rtlCol="0" anchor="ctr" wrap="square" lIns="101600" rIns="101600" tIns="76200" bIns="76200"/>
           <a:lstStyle/>
           <a:p>
             <a:pPr algn="l"/>
             <a:r>
-              <a:rPr sz="1500" b="0">
+              <a:rPr sz="1450" b="0">
                 <a:solidFill>
                   <a:srgbClr val="E8ECF2"/>
                 </a:solidFill>
@@ -4220,7 +4520,7 @@
           <a:p>
             <a:pPr algn="l"/>
             <a:r>
-              <a:rPr sz="1500" b="0">
+              <a:rPr sz="1450" b="0">
                 <a:solidFill>
                   <a:srgbClr val="E8ECF2"/>
                 </a:solidFill>
@@ -4233,7 +4533,7 @@
           <a:p>
             <a:pPr algn="l"/>
             <a:r>
-              <a:rPr sz="1500" b="0">
+              <a:rPr sz="1450" b="0">
                 <a:solidFill>
                   <a:srgbClr val="E8ECF2"/>
                 </a:solidFill>
@@ -4246,7 +4546,7 @@
           <a:p>
             <a:pPr algn="l"/>
             <a:r>
-              <a:rPr sz="1500" b="0">
+              <a:rPr sz="1450" b="0">
                 <a:solidFill>
                   <a:srgbClr val="E8ECF2"/>
                 </a:solidFill>
@@ -4259,7 +4559,7 @@
           <a:p>
             <a:pPr algn="l"/>
             <a:r>
-              <a:rPr sz="1500" b="0">
+              <a:rPr sz="1450" b="0">
                 <a:solidFill>
                   <a:srgbClr val="E8ECF2"/>
                 </a:solidFill>
@@ -4273,7 +4573,44 @@
       </p:sp>
       <p:sp>
         <p:nvSpPr>
-          <p:cNvPr id="6" name="TextBox 5"/>
+          <p:cNvPr id="7" name="TextBox 6"/>
+          <p:cNvSpPr txBox="1"/>
+          <p:nvPr/>
+        </p:nvSpPr>
+        <p:spPr>
+          <a:xfrm>
+            <a:off x="822960" y="6473952"/>
+            <a:ext cx="7315200" cy="274320"/>
+          </a:xfrm>
+          <a:prstGeom prst="rect">
+            <a:avLst/>
+          </a:prstGeom>
+          <a:noFill/>
+          <a:effectLst/>
+        </p:spPr>
+        <p:txBody>
+          <a:bodyPr wrap="square" lIns="50800" rIns="50800">
+            <a:spAutoFit/>
+          </a:bodyPr>
+          <a:lstStyle/>
+          <a:p>
+            <a:pPr algn="l"/>
+            <a:r>
+              <a:rPr sz="1000" b="0">
+                <a:solidFill>
+                  <a:srgbClr val="9AA7BC"/>
+                </a:solidFill>
+                <a:latin typeface="Segoe UI"/>
+                <a:ea typeface="Microsoft YaHei"/>
+              </a:rPr>
+              <a:t>DCC-MCP Framework Review — Demo</a:t>
+            </a:r>
+          </a:p>
+        </p:txBody>
+      </p:sp>
+      <p:sp>
+        <p:nvSpPr>
+          <p:cNvPr id="8" name="TextBox 7"/>
           <p:cNvSpPr txBox="1"/>
           <p:nvPr/>
         </p:nvSpPr>
@@ -4378,8 +4715,8 @@
         </p:nvSpPr>
         <p:spPr>
           <a:xfrm>
-            <a:off x="822960" y="457200"/>
-            <a:ext cx="10515600" cy="731520"/>
+            <a:off x="822960" y="502920"/>
+            <a:ext cx="10515600" cy="685800"/>
           </a:xfrm>
           <a:prstGeom prst="rect">
             <a:avLst/>
@@ -4395,7 +4732,7 @@
           <a:p>
             <a:pPr algn="l"/>
             <a:r>
-              <a:rPr sz="3000" b="1">
+              <a:rPr sz="2800" b="1">
                 <a:solidFill>
                   <a:srgbClr val="E8ECF2"/>
                 </a:solidFill>
@@ -4407,48 +4744,22 @@
           </a:p>
         </p:txBody>
       </p:sp>
-      <p:pic>
-        <p:nvPicPr>
-          <p:cNvPr id="4" name="Picture 3" descr="slide-06.png"/>
-          <p:cNvPicPr>
-            <a:picLocks noChangeAspect="1"/>
-          </p:cNvPicPr>
+      <p:sp>
+        <p:nvSpPr>
+          <p:cNvPr id="4" name="Rectangle 3"/>
+          <p:cNvSpPr/>
           <p:nvPr/>
-        </p:nvPicPr>
-        <p:blipFill>
-          <a:blip r:embed="rId2"/>
-          <a:stretch>
-            <a:fillRect/>
-          </a:stretch>
-        </p:blipFill>
-        <p:spPr>
-          <a:xfrm>
-            <a:off x="822960" y="1371600"/>
-            <a:ext cx="8453120" cy="4754880"/>
+        </p:nvSpPr>
+        <p:spPr>
+          <a:xfrm>
+            <a:off x="822960" y="1298448"/>
+            <a:ext cx="822960" cy="44450"/>
           </a:xfrm>
           <a:prstGeom prst="rect">
             <a:avLst/>
           </a:prstGeom>
-        </p:spPr>
-      </p:pic>
-      <p:sp>
-        <p:nvSpPr>
-          <p:cNvPr id="5" name="Rounded Rectangle 4"/>
-          <p:cNvSpPr/>
-          <p:nvPr/>
-        </p:nvSpPr>
-        <p:spPr>
-          <a:xfrm>
-            <a:off x="6766560" y="1371600"/>
-            <a:ext cx="4572000" cy="4754880"/>
-          </a:xfrm>
-          <a:prstGeom prst="roundRect">
-            <a:avLst>
-              <a:gd name="adj" fmla="val 6000"/>
-            </a:avLst>
-          </a:prstGeom>
           <a:solidFill>
-            <a:srgbClr val="1E2A3D"/>
+            <a:srgbClr val="4D9DE0"/>
           </a:solidFill>
           <a:ln>
             <a:noFill/>
@@ -4470,12 +4781,82 @@
           </a:fontRef>
         </p:style>
         <p:txBody>
+          <a:bodyPr rtlCol="0" anchor="ctr" wrap="square"/>
+          <a:lstStyle/>
+          <a:p>
+            <a:pPr algn="ctr"/>
+          </a:p>
+        </p:txBody>
+      </p:sp>
+      <p:pic>
+        <p:nvPicPr>
+          <p:cNvPr id="5" name="Picture 4" descr="slide-06.png"/>
+          <p:cNvPicPr>
+            <a:picLocks noChangeAspect="1"/>
+          </p:cNvPicPr>
+          <p:nvPr/>
+        </p:nvPicPr>
+        <p:blipFill>
+          <a:blip r:embed="rId2"/>
+          <a:stretch>
+            <a:fillRect/>
+          </a:stretch>
+        </p:blipFill>
+        <p:spPr>
+          <a:xfrm>
+            <a:off x="822960" y="1627632"/>
+            <a:ext cx="7640320" cy="4297680"/>
+          </a:xfrm>
+          <a:prstGeom prst="rect">
+            <a:avLst/>
+          </a:prstGeom>
+        </p:spPr>
+      </p:pic>
+      <p:sp>
+        <p:nvSpPr>
+          <p:cNvPr id="6" name="Rounded Rectangle 5"/>
+          <p:cNvSpPr/>
+          <p:nvPr/>
+        </p:nvSpPr>
+        <p:spPr>
+          <a:xfrm>
+            <a:off x="6446520" y="1627632"/>
+            <a:ext cx="4846320" cy="4297680"/>
+          </a:xfrm>
+          <a:prstGeom prst="roundRect">
+            <a:avLst>
+              <a:gd name="adj" fmla="val 5000"/>
+            </a:avLst>
+          </a:prstGeom>
+          <a:solidFill>
+            <a:srgbClr val="1E2A3D"/>
+          </a:solidFill>
+          <a:ln>
+            <a:noFill/>
+          </a:ln>
+          <a:effectLst/>
+        </p:spPr>
+        <p:style>
+          <a:lnRef idx="1">
+            <a:schemeClr val="accent1"/>
+          </a:lnRef>
+          <a:fillRef idx="3">
+            <a:schemeClr val="accent1"/>
+          </a:fillRef>
+          <a:effectRef idx="2">
+            <a:schemeClr val="accent1"/>
+          </a:effectRef>
+          <a:fontRef idx="minor">
+            <a:schemeClr val="lt1"/>
+          </a:fontRef>
+        </p:style>
+        <p:txBody>
           <a:bodyPr rtlCol="0" anchor="ctr" wrap="square" lIns="101600" rIns="101600" tIns="76200" bIns="76200"/>
           <a:lstStyle/>
           <a:p>
             <a:pPr algn="l"/>
             <a:r>
-              <a:rPr sz="1500" b="0">
+              <a:rPr sz="1450" b="0">
                 <a:solidFill>
                   <a:srgbClr val="E8ECF2"/>
                 </a:solidFill>
@@ -4488,7 +4869,7 @@
           <a:p>
             <a:pPr algn="l"/>
             <a:r>
-              <a:rPr sz="1500" b="0">
+              <a:rPr sz="1450" b="0">
                 <a:solidFill>
                   <a:srgbClr val="E8ECF2"/>
                 </a:solidFill>
@@ -4501,7 +4882,7 @@
           <a:p>
             <a:pPr algn="l"/>
             <a:r>
-              <a:rPr sz="1500" b="0">
+              <a:rPr sz="1450" b="0">
                 <a:solidFill>
                   <a:srgbClr val="E8ECF2"/>
                 </a:solidFill>
@@ -4514,7 +4895,7 @@
           <a:p>
             <a:pPr algn="l"/>
             <a:r>
-              <a:rPr sz="1500" b="0">
+              <a:rPr sz="1450" b="0">
                 <a:solidFill>
                   <a:srgbClr val="E8ECF2"/>
                 </a:solidFill>
@@ -4527,7 +4908,7 @@
           <a:p>
             <a:pPr algn="l"/>
             <a:r>
-              <a:rPr sz="1500" b="0">
+              <a:rPr sz="1450" b="0">
                 <a:solidFill>
                   <a:srgbClr val="E8ECF2"/>
                 </a:solidFill>
@@ -4541,7 +4922,44 @@
       </p:sp>
       <p:sp>
         <p:nvSpPr>
-          <p:cNvPr id="6" name="TextBox 5"/>
+          <p:cNvPr id="7" name="TextBox 6"/>
+          <p:cNvSpPr txBox="1"/>
+          <p:nvPr/>
+        </p:nvSpPr>
+        <p:spPr>
+          <a:xfrm>
+            <a:off x="822960" y="6473952"/>
+            <a:ext cx="7315200" cy="274320"/>
+          </a:xfrm>
+          <a:prstGeom prst="rect">
+            <a:avLst/>
+          </a:prstGeom>
+          <a:noFill/>
+          <a:effectLst/>
+        </p:spPr>
+        <p:txBody>
+          <a:bodyPr wrap="square" lIns="50800" rIns="50800">
+            <a:spAutoFit/>
+          </a:bodyPr>
+          <a:lstStyle/>
+          <a:p>
+            <a:pPr algn="l"/>
+            <a:r>
+              <a:rPr sz="1000" b="0">
+                <a:solidFill>
+                  <a:srgbClr val="9AA7BC"/>
+                </a:solidFill>
+                <a:latin typeface="Segoe UI"/>
+                <a:ea typeface="Microsoft YaHei"/>
+              </a:rPr>
+              <a:t>DCC-MCP Framework Review — Demo</a:t>
+            </a:r>
+          </a:p>
+        </p:txBody>
+      </p:sp>
+      <p:sp>
+        <p:nvSpPr>
+          <p:cNvPr id="8" name="TextBox 7"/>
           <p:cNvSpPr txBox="1"/>
           <p:nvPr/>
         </p:nvSpPr>
@@ -4684,14 +5102,58 @@
       </p:sp>
       <p:sp>
         <p:nvSpPr>
-          <p:cNvPr id="4" name="TextBox 3"/>
+          <p:cNvPr id="4" name="Oval 3"/>
+          <p:cNvSpPr/>
+          <p:nvPr/>
+        </p:nvSpPr>
+        <p:spPr>
+          <a:xfrm>
+            <a:off x="320040" y="320040"/>
+            <a:ext cx="2651760" cy="2651760"/>
+          </a:xfrm>
+          <a:prstGeom prst="ellipse">
+            <a:avLst/>
+          </a:prstGeom>
+          <a:solidFill>
+            <a:srgbClr val="223047"/>
+          </a:solidFill>
+          <a:ln>
+            <a:noFill/>
+          </a:ln>
+          <a:effectLst/>
+        </p:spPr>
+        <p:style>
+          <a:lnRef idx="1">
+            <a:schemeClr val="accent1"/>
+          </a:lnRef>
+          <a:fillRef idx="3">
+            <a:schemeClr val="accent1"/>
+          </a:fillRef>
+          <a:effectRef idx="2">
+            <a:schemeClr val="accent1"/>
+          </a:effectRef>
+          <a:fontRef idx="minor">
+            <a:schemeClr val="lt1"/>
+          </a:fontRef>
+        </p:style>
+        <p:txBody>
+          <a:bodyPr rtlCol="0" anchor="ctr"/>
+          <a:lstStyle/>
+          <a:p>
+            <a:pPr algn="ctr"/>
+          </a:p>
+        </p:txBody>
+      </p:sp>
+      <p:sp>
+        <p:nvSpPr>
+          <p:cNvPr id="5" name="TextBox 4"/>
           <p:cNvSpPr txBox="1"/>
           <p:nvPr/>
         </p:nvSpPr>
         <p:spPr>
           <a:xfrm>
-            <a:off x="1371600" y="2468880"/>
-            <a:ext cx="9418320" cy="1371600"/>
+            <a:off x="1371600" y="3063240"/>
+            <a:ext cx="9418320" cy="1097280"/>
           </a:xfrm>
           <a:prstGeom prst="rect">
             <a:avLst/>
@@ -4707,7 +5169,7 @@
           <a:p>
             <a:pPr algn="ctr"/>
             <a:r>
-              <a:rPr sz="4800" b="1">
+              <a:rPr sz="4600" b="1">
                 <a:solidFill>
                   <a:srgbClr val="E8ECF2"/>
                 </a:solidFill>
@@ -4721,14 +5183,14 @@
       </p:sp>
       <p:sp>
         <p:nvSpPr>
-          <p:cNvPr id="5" name="TextBox 4"/>
+          <p:cNvPr id="6" name="TextBox 5"/>
           <p:cNvSpPr txBox="1"/>
           <p:nvPr/>
         </p:nvSpPr>
         <p:spPr>
           <a:xfrm>
-            <a:off x="1371600" y="4023360"/>
-            <a:ext cx="9418320" cy="731520"/>
+            <a:off x="1371600" y="4343400"/>
+            <a:ext cx="9418320" cy="640080"/>
           </a:xfrm>
           <a:prstGeom prst="rect">
             <a:avLst/>
@@ -4744,7 +5206,7 @@
           <a:p>
             <a:pPr algn="ctr"/>
             <a:r>
-              <a:rPr sz="1800" b="0">
+              <a:rPr sz="1600" b="0">
                 <a:solidFill>
                   <a:srgbClr val="9AA7BC"/>
                 </a:solidFill>
@@ -4758,7 +5220,44 @@
       </p:sp>
       <p:sp>
         <p:nvSpPr>
-          <p:cNvPr id="6" name="TextBox 5"/>
+          <p:cNvPr id="7" name="TextBox 6"/>
+          <p:cNvSpPr txBox="1"/>
+          <p:nvPr/>
+        </p:nvSpPr>
+        <p:spPr>
+          <a:xfrm>
+            <a:off x="822960" y="6473952"/>
+            <a:ext cx="7315200" cy="274320"/>
+          </a:xfrm>
+          <a:prstGeom prst="rect">
+            <a:avLst/>
+          </a:prstGeom>
+          <a:noFill/>
+          <a:effectLst/>
+        </p:spPr>
+        <p:txBody>
+          <a:bodyPr wrap="square" lIns="50800" rIns="50800">
+            <a:spAutoFit/>
+          </a:bodyPr>
+          <a:lstStyle/>
+          <a:p>
+            <a:pPr algn="l"/>
+            <a:r>
+              <a:rPr sz="1000" b="0">
+                <a:solidFill>
+                  <a:srgbClr val="9AA7BC"/>
+                </a:solidFill>
+                <a:latin typeface="Segoe UI"/>
+                <a:ea typeface="Microsoft YaHei"/>
+              </a:rPr>
+              <a:t>DCC-MCP Framework Review — Demo</a:t>
+            </a:r>
+          </a:p>
+        </p:txBody>
+      </p:sp>
+      <p:sp>
+        <p:nvSpPr>
+          <p:cNvPr id="8" name="TextBox 7"/>
           <p:cNvSpPr txBox="1"/>
           <p:nvPr/>
         </p:nvSpPr>

--- a/examples/output/review-demo/draft-review-dcc-mcp-framework.pptx
+++ b/examples/output/review-demo/draft-review-dcc-mcp-framework.pptx
@@ -4441,7 +4441,7 @@
       </p:sp>
       <p:pic>
         <p:nvPicPr>
-          <p:cNvPr id="5" name="Picture 4" descr="slide-04.png"/>
+          <p:cNvPr id="5" name="Picture 4" descr="examples/output/previews/slide-04.png"/>
           <p:cNvPicPr>
             <a:picLocks noChangeAspect="1"/>
           </p:cNvPicPr>
@@ -4461,6 +4461,7 @@
           <a:prstGeom prst="rect">
             <a:avLst/>
           </a:prstGeom>
+          <a:effectLst/>
         </p:spPr>
       </p:pic>
       <p:sp>
@@ -4790,7 +4791,7 @@
       </p:sp>
       <p:pic>
         <p:nvPicPr>
-          <p:cNvPr id="5" name="Picture 4" descr="slide-06.png"/>
+          <p:cNvPr id="5" name="Picture 4" descr="examples/output/previews/slide-06.png"/>
           <p:cNvPicPr>
             <a:picLocks noChangeAspect="1"/>
           </p:cNvPicPr>
@@ -4810,6 +4811,7 @@
           <a:prstGeom prst="rect">
             <a:avLst/>
           </a:prstGeom>
+          <a:effectLst/>
         </p:spPr>
       </p:pic>
       <p:sp>
